--- a/SQL/SQL Python.pptx
+++ b/SQL/SQL Python.pptx
@@ -14,10 +14,6 @@
     <p:sldId id="261" r:id="rId8"/>
     <p:sldId id="262" r:id="rId9"/>
     <p:sldId id="263" r:id="rId10"/>
-    <p:sldId id="264" r:id="rId11"/>
-    <p:sldId id="265" r:id="rId12"/>
-    <p:sldId id="266" r:id="rId13"/>
-    <p:sldId id="267" r:id="rId14"/>
   </p:sldIdLst>
   <p:sldSz cx="12192000" cy="6858000"/>
   <p:notesSz cx="6858000" cy="9144000"/>
@@ -3410,1436 +3406,6 @@
     <p:extLst>
       <p:ext uri="{BB962C8B-B14F-4D97-AF65-F5344CB8AC3E}">
         <p14:creationId xmlns:p14="http://schemas.microsoft.com/office/powerpoint/2010/main" val="2988879680"/>
-      </p:ext>
-    </p:extLst>
-  </p:cSld>
-  <p:clrMapOvr>
-    <a:masterClrMapping/>
-  </p:clrMapOvr>
-</p:sld>
-</file>
-
-<file path=ppt/slides/slide10.xml><?xml version="1.0" encoding="utf-8"?>
-<p:sld xmlns:a="http://schemas.openxmlformats.org/drawingml/2006/main" xmlns:r="http://schemas.openxmlformats.org/officeDocument/2006/relationships" xmlns:p="http://schemas.openxmlformats.org/presentationml/2006/main">
-  <p:cSld>
-    <p:spTree>
-      <p:nvGrpSpPr>
-        <p:cNvPr id="1" name=""/>
-        <p:cNvGrpSpPr/>
-        <p:nvPr/>
-      </p:nvGrpSpPr>
-      <p:grpSpPr>
-        <a:xfrm>
-          <a:off x="0" y="0"/>
-          <a:ext cx="0" cy="0"/>
-          <a:chOff x="0" y="0"/>
-          <a:chExt cx="0" cy="0"/>
-        </a:xfrm>
-      </p:grpSpPr>
-      <p:sp>
-        <p:nvSpPr>
-          <p:cNvPr id="2" name="Title 1">
-            <a:extLst>
-              <a:ext uri="{FF2B5EF4-FFF2-40B4-BE49-F238E27FC236}">
-                <a16:creationId xmlns:a16="http://schemas.microsoft.com/office/drawing/2014/main" id="{E93BBD33-EB2A-21D5-4519-BE8B014A9161}"/>
-              </a:ext>
-            </a:extLst>
-          </p:cNvPr>
-          <p:cNvSpPr>
-            <a:spLocks noGrp="1"/>
-          </p:cNvSpPr>
-          <p:nvPr>
-            <p:ph type="title"/>
-          </p:nvPr>
-        </p:nvSpPr>
-        <p:spPr/>
-        <p:txBody>
-          <a:bodyPr/>
-          <a:lstStyle/>
-          <a:p>
-            <a:r>
-              <a:rPr lang="en-US" dirty="0"/>
-              <a:t>Why Stored Procedures?</a:t>
-            </a:r>
-          </a:p>
-        </p:txBody>
-      </p:sp>
-      <p:sp>
-        <p:nvSpPr>
-          <p:cNvPr id="3" name="Content Placeholder 2">
-            <a:extLst>
-              <a:ext uri="{FF2B5EF4-FFF2-40B4-BE49-F238E27FC236}">
-                <a16:creationId xmlns:a16="http://schemas.microsoft.com/office/drawing/2014/main" id="{14D47FCC-E8CE-1055-FA7F-1BB4906FDBE2}"/>
-              </a:ext>
-            </a:extLst>
-          </p:cNvPr>
-          <p:cNvSpPr>
-            <a:spLocks noGrp="1"/>
-          </p:cNvSpPr>
-          <p:nvPr>
-            <p:ph idx="1"/>
-          </p:nvPr>
-        </p:nvSpPr>
-        <p:spPr/>
-        <p:txBody>
-          <a:bodyPr>
-            <a:normAutofit lnSpcReduction="10000"/>
-          </a:bodyPr>
-          <a:lstStyle/>
-          <a:p>
-            <a:pPr marL="514350" indent="-514350">
-              <a:buFont typeface="+mj-lt"/>
-              <a:buAutoNum type="arabicPeriod"/>
-            </a:pPr>
-            <a:r>
-              <a:rPr lang="en-US" dirty="0"/>
-              <a:t>Database defends itself, not dependent on the application.</a:t>
-            </a:r>
-          </a:p>
-          <a:p>
-            <a:pPr marL="514350" indent="-514350">
-              <a:buFont typeface="+mj-lt"/>
-              <a:buAutoNum type="arabicPeriod"/>
-            </a:pPr>
-            <a:r>
-              <a:rPr lang="en-US" dirty="0"/>
-              <a:t>Additional layer of security and abstraction.  Table and column names hidden from the application.  (Principle of least privilege)</a:t>
-            </a:r>
-          </a:p>
-          <a:p>
-            <a:pPr marL="514350" indent="-514350">
-              <a:buFont typeface="+mj-lt"/>
-              <a:buAutoNum type="arabicPeriod"/>
-            </a:pPr>
-            <a:r>
-              <a:rPr lang="en-US" dirty="0"/>
-              <a:t>Protects against SQL Injection.</a:t>
-            </a:r>
-          </a:p>
-          <a:p>
-            <a:pPr marL="514350" indent="-514350">
-              <a:buFont typeface="+mj-lt"/>
-              <a:buAutoNum type="arabicPeriod"/>
-            </a:pPr>
-            <a:r>
-              <a:rPr lang="en-US" dirty="0"/>
-              <a:t>Reduced Network Traffic.</a:t>
-            </a:r>
-          </a:p>
-          <a:p>
-            <a:pPr marL="514350" indent="-514350">
-              <a:buFont typeface="+mj-lt"/>
-              <a:buAutoNum type="arabicPeriod"/>
-            </a:pPr>
-            <a:r>
-              <a:rPr lang="en-US" dirty="0"/>
-              <a:t>Shared between multiple app clients.</a:t>
-            </a:r>
-          </a:p>
-          <a:p>
-            <a:pPr marL="514350" indent="-514350">
-              <a:buFont typeface="+mj-lt"/>
-              <a:buAutoNum type="arabicPeriod"/>
-            </a:pPr>
-            <a:r>
-              <a:rPr lang="en-US" dirty="0"/>
-              <a:t>Centralize data processing.</a:t>
-            </a:r>
-          </a:p>
-          <a:p>
-            <a:pPr marL="514350" indent="-514350">
-              <a:buFont typeface="+mj-lt"/>
-              <a:buAutoNum type="arabicPeriod"/>
-            </a:pPr>
-            <a:endParaRPr lang="en-US" dirty="0"/>
-          </a:p>
-          <a:p>
-            <a:pPr marL="0" indent="0">
-              <a:buNone/>
-            </a:pPr>
-            <a:r>
-              <a:rPr lang="en-US" dirty="0"/>
-              <a:t>I will be producing a full video on stored procedures. </a:t>
-            </a:r>
-          </a:p>
-        </p:txBody>
-      </p:sp>
-    </p:spTree>
-    <p:extLst>
-      <p:ext uri="{BB962C8B-B14F-4D97-AF65-F5344CB8AC3E}">
-        <p14:creationId xmlns:p14="http://schemas.microsoft.com/office/powerpoint/2010/main" val="3442985342"/>
-      </p:ext>
-    </p:extLst>
-  </p:cSld>
-  <p:clrMapOvr>
-    <a:masterClrMapping/>
-  </p:clrMapOvr>
-</p:sld>
-</file>
-
-<file path=ppt/slides/slide11.xml><?xml version="1.0" encoding="utf-8"?>
-<p:sld xmlns:a="http://schemas.openxmlformats.org/drawingml/2006/main" xmlns:r="http://schemas.openxmlformats.org/officeDocument/2006/relationships" xmlns:p="http://schemas.openxmlformats.org/presentationml/2006/main">
-  <p:cSld>
-    <p:spTree>
-      <p:nvGrpSpPr>
-        <p:cNvPr id="1" name=""/>
-        <p:cNvGrpSpPr/>
-        <p:nvPr/>
-      </p:nvGrpSpPr>
-      <p:grpSpPr>
-        <a:xfrm>
-          <a:off x="0" y="0"/>
-          <a:ext cx="0" cy="0"/>
-          <a:chOff x="0" y="0"/>
-          <a:chExt cx="0" cy="0"/>
-        </a:xfrm>
-      </p:grpSpPr>
-      <p:sp>
-        <p:nvSpPr>
-          <p:cNvPr id="2" name="Title 1">
-            <a:extLst>
-              <a:ext uri="{FF2B5EF4-FFF2-40B4-BE49-F238E27FC236}">
-                <a16:creationId xmlns:a16="http://schemas.microsoft.com/office/drawing/2014/main" id="{7AE9DAA9-C7EF-EC04-C263-1CE6BA55FD98}"/>
-              </a:ext>
-            </a:extLst>
-          </p:cNvPr>
-          <p:cNvSpPr>
-            <a:spLocks noGrp="1"/>
-          </p:cNvSpPr>
-          <p:nvPr>
-            <p:ph type="title"/>
-          </p:nvPr>
-        </p:nvSpPr>
-        <p:spPr/>
-        <p:txBody>
-          <a:bodyPr/>
-          <a:lstStyle/>
-          <a:p>
-            <a:r>
-              <a:rPr lang="en-US" dirty="0"/>
-              <a:t>Data Validation</a:t>
-            </a:r>
-          </a:p>
-        </p:txBody>
-      </p:sp>
-      <p:sp>
-        <p:nvSpPr>
-          <p:cNvPr id="3" name="Content Placeholder 2">
-            <a:extLst>
-              <a:ext uri="{FF2B5EF4-FFF2-40B4-BE49-F238E27FC236}">
-                <a16:creationId xmlns:a16="http://schemas.microsoft.com/office/drawing/2014/main" id="{B689681C-057B-33DF-FF1F-F5D522C678AD}"/>
-              </a:ext>
-            </a:extLst>
-          </p:cNvPr>
-          <p:cNvSpPr>
-            <a:spLocks noGrp="1"/>
-          </p:cNvSpPr>
-          <p:nvPr>
-            <p:ph idx="1"/>
-          </p:nvPr>
-        </p:nvSpPr>
-        <p:spPr/>
-        <p:txBody>
-          <a:bodyPr>
-            <a:normAutofit/>
-          </a:bodyPr>
-          <a:lstStyle/>
-          <a:p>
-            <a:r>
-              <a:rPr lang="en-US" dirty="0"/>
-              <a:t>Data validation should always be done on the server.  By server that could be the app server or database server but I recommend the database server.</a:t>
-            </a:r>
-          </a:p>
-          <a:p>
-            <a:endParaRPr lang="en-US" dirty="0"/>
-          </a:p>
-          <a:p>
-            <a:pPr marL="0" indent="0">
-              <a:buNone/>
-            </a:pPr>
-            <a:r>
-              <a:rPr lang="en-US" dirty="0"/>
-              <a:t>We could add this snipped to our stored procedure:</a:t>
-            </a:r>
-          </a:p>
-          <a:p>
-            <a:pPr marL="0" indent="0">
-              <a:buNone/>
-            </a:pPr>
-            <a:r>
-              <a:rPr lang="en-US" sz="1600" dirty="0"/>
-              <a:t> IF </a:t>
-            </a:r>
-            <a:r>
-              <a:rPr lang="en-US" sz="1600" dirty="0" err="1"/>
-              <a:t>p_username</a:t>
-            </a:r>
-            <a:r>
-              <a:rPr lang="en-US" sz="1600" dirty="0"/>
-              <a:t> LIKE '%--%' OR </a:t>
-            </a:r>
-            <a:r>
-              <a:rPr lang="en-US" sz="1600" dirty="0" err="1"/>
-              <a:t>p_username</a:t>
-            </a:r>
-            <a:r>
-              <a:rPr lang="en-US" sz="1600" dirty="0"/>
-              <a:t> LIKE '%''%' THEN</a:t>
-            </a:r>
-          </a:p>
-          <a:p>
-            <a:pPr marL="0" indent="0">
-              <a:buNone/>
-            </a:pPr>
-            <a:r>
-              <a:rPr lang="en-US" sz="1600" dirty="0"/>
-              <a:t>       INSERT INTO </a:t>
-            </a:r>
-            <a:r>
-              <a:rPr lang="en-US" sz="1600" dirty="0" err="1"/>
-              <a:t>user_log</a:t>
-            </a:r>
-            <a:r>
-              <a:rPr lang="en-US" sz="1600" dirty="0"/>
-              <a:t> (username, status, message, </a:t>
-            </a:r>
-            <a:r>
-              <a:rPr lang="en-US" sz="1600" dirty="0" err="1"/>
-              <a:t>log_date</a:t>
-            </a:r>
-            <a:r>
-              <a:rPr lang="en-US" sz="1600" dirty="0"/>
-              <a:t>)</a:t>
-            </a:r>
-          </a:p>
-          <a:p>
-            <a:pPr marL="0" indent="0">
-              <a:buNone/>
-            </a:pPr>
-            <a:r>
-              <a:rPr lang="en-US" sz="1600" dirty="0"/>
-              <a:t>	VALUES (</a:t>
-            </a:r>
-            <a:r>
-              <a:rPr lang="en-US" sz="1600" dirty="0" err="1"/>
-              <a:t>p_username</a:t>
-            </a:r>
-            <a:r>
-              <a:rPr lang="en-US" sz="1600" dirty="0"/>
-              <a:t>, -2, 'SQL INJECTION ATTEMPTED', SYSDATE());</a:t>
-            </a:r>
-          </a:p>
-          <a:p>
-            <a:pPr marL="0" indent="0">
-              <a:buNone/>
-            </a:pPr>
-            <a:r>
-              <a:rPr lang="en-US" sz="1600" dirty="0"/>
-              <a:t>        SELECT -2 AS `status`, 'User Not Found' AS </a:t>
-            </a:r>
-            <a:r>
-              <a:rPr lang="en-US" sz="1600" dirty="0" err="1"/>
-              <a:t>message,userId</a:t>
-            </a:r>
-            <a:r>
-              <a:rPr lang="en-US" sz="1600" dirty="0"/>
-              <a:t>, </a:t>
-            </a:r>
-            <a:r>
-              <a:rPr lang="en-US" sz="1600" dirty="0" err="1"/>
-              <a:t>p_username</a:t>
-            </a:r>
-            <a:r>
-              <a:rPr lang="en-US" sz="1600" dirty="0"/>
-              <a:t> AS username, 0 AS </a:t>
-            </a:r>
-            <a:r>
-              <a:rPr lang="en-US" sz="1600" dirty="0" err="1"/>
-              <a:t>roleId</a:t>
-            </a:r>
-            <a:r>
-              <a:rPr lang="en-US" sz="1600" dirty="0"/>
-              <a:t>;</a:t>
-            </a:r>
-          </a:p>
-          <a:p>
-            <a:pPr marL="0" indent="0">
-              <a:buNone/>
-            </a:pPr>
-            <a:r>
-              <a:rPr lang="en-US" sz="1600" dirty="0"/>
-              <a:t>        LEAVE main;</a:t>
-            </a:r>
-          </a:p>
-          <a:p>
-            <a:pPr marL="0" indent="0">
-              <a:buNone/>
-            </a:pPr>
-            <a:r>
-              <a:rPr lang="en-US" sz="1600" dirty="0"/>
-              <a:t>  END IF;</a:t>
-            </a:r>
-          </a:p>
-        </p:txBody>
-      </p:sp>
-    </p:spTree>
-    <p:extLst>
-      <p:ext uri="{BB962C8B-B14F-4D97-AF65-F5344CB8AC3E}">
-        <p14:creationId xmlns:p14="http://schemas.microsoft.com/office/powerpoint/2010/main" val="4194182282"/>
-      </p:ext>
-    </p:extLst>
-  </p:cSld>
-  <p:clrMapOvr>
-    <a:masterClrMapping/>
-  </p:clrMapOvr>
-</p:sld>
-</file>
-
-<file path=ppt/slides/slide12.xml><?xml version="1.0" encoding="utf-8"?>
-<p:sld xmlns:a="http://schemas.openxmlformats.org/drawingml/2006/main" xmlns:r="http://schemas.openxmlformats.org/officeDocument/2006/relationships" xmlns:p="http://schemas.openxmlformats.org/presentationml/2006/main">
-  <p:cSld>
-    <p:spTree>
-      <p:nvGrpSpPr>
-        <p:cNvPr id="1" name=""/>
-        <p:cNvGrpSpPr/>
-        <p:nvPr/>
-      </p:nvGrpSpPr>
-      <p:grpSpPr>
-        <a:xfrm>
-          <a:off x="0" y="0"/>
-          <a:ext cx="0" cy="0"/>
-          <a:chOff x="0" y="0"/>
-          <a:chExt cx="0" cy="0"/>
-        </a:xfrm>
-      </p:grpSpPr>
-      <p:sp>
-        <p:nvSpPr>
-          <p:cNvPr id="2" name="Title 1">
-            <a:extLst>
-              <a:ext uri="{FF2B5EF4-FFF2-40B4-BE49-F238E27FC236}">
-                <a16:creationId xmlns:a16="http://schemas.microsoft.com/office/drawing/2014/main" id="{B0EEC66D-EF9B-59B3-C614-BBC6BE91B81B}"/>
-              </a:ext>
-            </a:extLst>
-          </p:cNvPr>
-          <p:cNvSpPr>
-            <a:spLocks noGrp="1"/>
-          </p:cNvSpPr>
-          <p:nvPr>
-            <p:ph type="title"/>
-          </p:nvPr>
-        </p:nvSpPr>
-        <p:spPr/>
-        <p:txBody>
-          <a:bodyPr/>
-          <a:lstStyle/>
-          <a:p>
-            <a:r>
-              <a:rPr lang="en-US" dirty="0"/>
-              <a:t>Email Alert Admin.</a:t>
-            </a:r>
-          </a:p>
-        </p:txBody>
-      </p:sp>
-      <p:sp>
-        <p:nvSpPr>
-          <p:cNvPr id="3" name="Content Placeholder 2">
-            <a:extLst>
-              <a:ext uri="{FF2B5EF4-FFF2-40B4-BE49-F238E27FC236}">
-                <a16:creationId xmlns:a16="http://schemas.microsoft.com/office/drawing/2014/main" id="{F2F18E27-4C9A-1E11-7CFE-B12B55E705DA}"/>
-              </a:ext>
-            </a:extLst>
-          </p:cNvPr>
-          <p:cNvSpPr>
-            <a:spLocks noGrp="1"/>
-          </p:cNvSpPr>
-          <p:nvPr>
-            <p:ph idx="1"/>
-          </p:nvPr>
-        </p:nvSpPr>
-        <p:spPr/>
-        <p:txBody>
-          <a:bodyPr>
-            <a:normAutofit/>
-          </a:bodyPr>
-          <a:lstStyle/>
-          <a:p>
-            <a:pPr marL="0" indent="0">
-              <a:lnSpc>
-                <a:spcPts val="1350"/>
-              </a:lnSpc>
-              <a:buNone/>
-            </a:pPr>
-            <a:endParaRPr lang="en-US" sz="1800" b="0" dirty="0">
-              <a:solidFill>
-                <a:srgbClr val="C586C0"/>
-              </a:solidFill>
-              <a:effectLst/>
-              <a:latin typeface="Menlo" panose="020B0609030804020204" pitchFamily="49" charset="0"/>
-            </a:endParaRPr>
-          </a:p>
-          <a:p>
-            <a:pPr marL="0" indent="0">
-              <a:lnSpc>
-                <a:spcPts val="1350"/>
-              </a:lnSpc>
-              <a:buNone/>
-            </a:pPr>
-            <a:r>
-              <a:rPr lang="en-US" sz="2400" b="0" dirty="0">
-                <a:solidFill>
-                  <a:srgbClr val="C586C0"/>
-                </a:solidFill>
-                <a:effectLst/>
-                <a:latin typeface="Menlo" panose="020B0609030804020204" pitchFamily="49" charset="0"/>
-              </a:rPr>
-              <a:t>if</a:t>
-            </a:r>
-            <a:r>
-              <a:rPr lang="en-US" sz="2400" b="0" dirty="0">
-                <a:solidFill>
-                  <a:srgbClr val="CCCCCC"/>
-                </a:solidFill>
-                <a:effectLst/>
-                <a:latin typeface="Menlo" panose="020B0609030804020204" pitchFamily="49" charset="0"/>
-              </a:rPr>
-              <a:t>(</a:t>
-            </a:r>
-            <a:r>
-              <a:rPr lang="en-US" sz="2400" b="0" dirty="0">
-                <a:solidFill>
-                  <a:srgbClr val="4FC1FF"/>
-                </a:solidFill>
-                <a:effectLst/>
-                <a:latin typeface="Menlo" panose="020B0609030804020204" pitchFamily="49" charset="0"/>
-              </a:rPr>
-              <a:t>resp</a:t>
-            </a:r>
-            <a:r>
-              <a:rPr lang="en-US" sz="2400" b="0" dirty="0">
-                <a:solidFill>
-                  <a:srgbClr val="CCCCCC"/>
-                </a:solidFill>
-                <a:effectLst/>
-                <a:latin typeface="Menlo" panose="020B0609030804020204" pitchFamily="49" charset="0"/>
-              </a:rPr>
-              <a:t>[</a:t>
-            </a:r>
-            <a:r>
-              <a:rPr lang="en-US" sz="2400" b="0" dirty="0">
-                <a:solidFill>
-                  <a:srgbClr val="B5CEA8"/>
-                </a:solidFill>
-                <a:effectLst/>
-                <a:latin typeface="Menlo" panose="020B0609030804020204" pitchFamily="49" charset="0"/>
-              </a:rPr>
-              <a:t>0</a:t>
-            </a:r>
-            <a:r>
-              <a:rPr lang="en-US" sz="2400" b="0" dirty="0">
-                <a:solidFill>
-                  <a:srgbClr val="CCCCCC"/>
-                </a:solidFill>
-                <a:effectLst/>
-                <a:latin typeface="Menlo" panose="020B0609030804020204" pitchFamily="49" charset="0"/>
-              </a:rPr>
-              <a:t>].</a:t>
-            </a:r>
-            <a:r>
-              <a:rPr lang="en-US" sz="2400" b="0" dirty="0">
-                <a:solidFill>
-                  <a:srgbClr val="9CDCFE"/>
-                </a:solidFill>
-                <a:effectLst/>
-                <a:latin typeface="Menlo" panose="020B0609030804020204" pitchFamily="49" charset="0"/>
-              </a:rPr>
-              <a:t>status</a:t>
-            </a:r>
-            <a:r>
-              <a:rPr lang="en-US" sz="2400" b="0" dirty="0">
-                <a:solidFill>
-                  <a:srgbClr val="D4D4D4"/>
-                </a:solidFill>
-                <a:effectLst/>
-                <a:latin typeface="Menlo" panose="020B0609030804020204" pitchFamily="49" charset="0"/>
-              </a:rPr>
-              <a:t>===-</a:t>
-            </a:r>
-            <a:r>
-              <a:rPr lang="en-US" sz="2400" b="0" dirty="0">
-                <a:solidFill>
-                  <a:srgbClr val="B5CEA8"/>
-                </a:solidFill>
-                <a:effectLst/>
-                <a:latin typeface="Menlo" panose="020B0609030804020204" pitchFamily="49" charset="0"/>
-              </a:rPr>
-              <a:t>2</a:t>
-            </a:r>
-            <a:r>
-              <a:rPr lang="en-US" sz="2400" b="0" dirty="0">
-                <a:solidFill>
-                  <a:srgbClr val="CCCCCC"/>
-                </a:solidFill>
-                <a:effectLst/>
-                <a:latin typeface="Menlo" panose="020B0609030804020204" pitchFamily="49" charset="0"/>
-              </a:rPr>
-              <a:t>)</a:t>
-            </a:r>
-          </a:p>
-          <a:p>
-            <a:pPr marL="0" indent="0">
-              <a:lnSpc>
-                <a:spcPts val="1350"/>
-              </a:lnSpc>
-              <a:buNone/>
-            </a:pPr>
-            <a:r>
-              <a:rPr lang="en-US" sz="2400" b="0" dirty="0">
-                <a:solidFill>
-                  <a:srgbClr val="CCCCCC"/>
-                </a:solidFill>
-                <a:effectLst/>
-                <a:latin typeface="Menlo" panose="020B0609030804020204" pitchFamily="49" charset="0"/>
-              </a:rPr>
-              <a:t>{</a:t>
-            </a:r>
-          </a:p>
-          <a:p>
-            <a:pPr marL="457200" lvl="1" indent="0">
-              <a:lnSpc>
-                <a:spcPts val="1350"/>
-              </a:lnSpc>
-              <a:buNone/>
-            </a:pPr>
-            <a:r>
-              <a:rPr lang="en-US" b="0" dirty="0">
-                <a:solidFill>
-                  <a:srgbClr val="6A9955"/>
-                </a:solidFill>
-                <a:effectLst/>
-                <a:latin typeface="Menlo" panose="020B0609030804020204" pitchFamily="49" charset="0"/>
-              </a:rPr>
-              <a:t>// SQL </a:t>
-            </a:r>
-            <a:r>
-              <a:rPr lang="en-US" b="0" dirty="0" err="1">
-                <a:solidFill>
-                  <a:srgbClr val="6A9955"/>
-                </a:solidFill>
-                <a:effectLst/>
-                <a:latin typeface="Menlo" panose="020B0609030804020204" pitchFamily="49" charset="0"/>
-              </a:rPr>
-              <a:t>Injectio</a:t>
-            </a:r>
-            <a:r>
-              <a:rPr lang="en-US" b="0" dirty="0">
-                <a:solidFill>
-                  <a:srgbClr val="6A9955"/>
-                </a:solidFill>
-                <a:effectLst/>
-                <a:latin typeface="Menlo" panose="020B0609030804020204" pitchFamily="49" charset="0"/>
-              </a:rPr>
-              <a:t> attempted;</a:t>
-            </a:r>
-            <a:endParaRPr lang="en-US" b="0" dirty="0">
-              <a:solidFill>
-                <a:srgbClr val="CCCCCC"/>
-              </a:solidFill>
-              <a:effectLst/>
-              <a:latin typeface="Menlo" panose="020B0609030804020204" pitchFamily="49" charset="0"/>
-            </a:endParaRPr>
-          </a:p>
-          <a:p>
-            <a:pPr marL="457200" lvl="1" indent="0">
-              <a:lnSpc>
-                <a:spcPts val="1350"/>
-              </a:lnSpc>
-              <a:buNone/>
-            </a:pPr>
-            <a:r>
-              <a:rPr lang="en-US" b="0" dirty="0">
-                <a:solidFill>
-                  <a:srgbClr val="569CD6"/>
-                </a:solidFill>
-                <a:effectLst/>
-                <a:latin typeface="Menlo" panose="020B0609030804020204" pitchFamily="49" charset="0"/>
-              </a:rPr>
-              <a:t>const</a:t>
-            </a:r>
-            <a:r>
-              <a:rPr lang="en-US" b="0" dirty="0">
-                <a:solidFill>
-                  <a:srgbClr val="CCCCCC"/>
-                </a:solidFill>
-                <a:effectLst/>
-                <a:latin typeface="Menlo" panose="020B0609030804020204" pitchFamily="49" charset="0"/>
-              </a:rPr>
-              <a:t> </a:t>
-            </a:r>
-            <a:r>
-              <a:rPr lang="en-US" b="0" dirty="0" err="1">
-                <a:solidFill>
-                  <a:srgbClr val="4FC1FF"/>
-                </a:solidFill>
-                <a:effectLst/>
-                <a:latin typeface="Menlo" panose="020B0609030804020204" pitchFamily="49" charset="0"/>
-              </a:rPr>
-              <a:t>contactEmail</a:t>
-            </a:r>
-            <a:r>
-              <a:rPr lang="en-US" b="0" dirty="0">
-                <a:solidFill>
-                  <a:srgbClr val="CCCCCC"/>
-                </a:solidFill>
-                <a:effectLst/>
-                <a:latin typeface="Menlo" panose="020B0609030804020204" pitchFamily="49" charset="0"/>
-              </a:rPr>
-              <a:t> </a:t>
-            </a:r>
-            <a:r>
-              <a:rPr lang="en-US" b="0" dirty="0">
-                <a:solidFill>
-                  <a:srgbClr val="D4D4D4"/>
-                </a:solidFill>
-                <a:effectLst/>
-                <a:latin typeface="Menlo" panose="020B0609030804020204" pitchFamily="49" charset="0"/>
-              </a:rPr>
-              <a:t>=</a:t>
-            </a:r>
-            <a:r>
-              <a:rPr lang="en-US" b="0" dirty="0">
-                <a:solidFill>
-                  <a:srgbClr val="CCCCCC"/>
-                </a:solidFill>
-                <a:effectLst/>
-                <a:latin typeface="Menlo" panose="020B0609030804020204" pitchFamily="49" charset="0"/>
-              </a:rPr>
-              <a:t> {</a:t>
-            </a:r>
-          </a:p>
-          <a:p>
-            <a:pPr marL="457200" lvl="1" indent="0">
-              <a:lnSpc>
-                <a:spcPts val="1350"/>
-              </a:lnSpc>
-              <a:buNone/>
-            </a:pPr>
-            <a:r>
-              <a:rPr lang="en-US" b="0" dirty="0">
-                <a:solidFill>
-                  <a:srgbClr val="9CDCFE"/>
-                </a:solidFill>
-                <a:effectLst/>
-                <a:latin typeface="Menlo" panose="020B0609030804020204" pitchFamily="49" charset="0"/>
-              </a:rPr>
-              <a:t>to:</a:t>
-            </a:r>
-            <a:r>
-              <a:rPr lang="en-US" b="0" dirty="0">
-                <a:solidFill>
-                  <a:srgbClr val="CCCCCC"/>
-                </a:solidFill>
-                <a:effectLst/>
-                <a:latin typeface="Menlo" panose="020B0609030804020204" pitchFamily="49" charset="0"/>
-              </a:rPr>
-              <a:t> </a:t>
-            </a:r>
-            <a:r>
-              <a:rPr lang="en-US" b="0" dirty="0">
-                <a:solidFill>
-                  <a:srgbClr val="CE9178"/>
-                </a:solidFill>
-                <a:effectLst/>
-                <a:latin typeface="Menlo" panose="020B0609030804020204" pitchFamily="49" charset="0"/>
-              </a:rPr>
-              <a:t>"</a:t>
-            </a:r>
-            <a:r>
-              <a:rPr lang="en-US" b="0" dirty="0" err="1">
-                <a:solidFill>
-                  <a:srgbClr val="CE9178"/>
-                </a:solidFill>
-                <a:effectLst/>
-                <a:latin typeface="Menlo" panose="020B0609030804020204" pitchFamily="49" charset="0"/>
-              </a:rPr>
-              <a:t>appjedi.net@gmail.com</a:t>
-            </a:r>
-            <a:r>
-              <a:rPr lang="en-US" b="0" dirty="0">
-                <a:solidFill>
-                  <a:srgbClr val="CE9178"/>
-                </a:solidFill>
-                <a:effectLst/>
-                <a:latin typeface="Menlo" panose="020B0609030804020204" pitchFamily="49" charset="0"/>
-              </a:rPr>
-              <a:t>"</a:t>
-            </a:r>
-            <a:r>
-              <a:rPr lang="en-US" b="0" dirty="0">
-                <a:solidFill>
-                  <a:srgbClr val="CCCCCC"/>
-                </a:solidFill>
-                <a:effectLst/>
-                <a:latin typeface="Menlo" panose="020B0609030804020204" pitchFamily="49" charset="0"/>
-              </a:rPr>
-              <a:t>,</a:t>
-            </a:r>
-          </a:p>
-          <a:p>
-            <a:pPr marL="457200" lvl="1" indent="0">
-              <a:lnSpc>
-                <a:spcPts val="1350"/>
-              </a:lnSpc>
-              <a:buNone/>
-            </a:pPr>
-            <a:r>
-              <a:rPr lang="en-US" b="0" dirty="0">
-                <a:solidFill>
-                  <a:srgbClr val="9CDCFE"/>
-                </a:solidFill>
-                <a:effectLst/>
-                <a:latin typeface="Menlo" panose="020B0609030804020204" pitchFamily="49" charset="0"/>
-              </a:rPr>
-              <a:t>from:</a:t>
-            </a:r>
-            <a:r>
-              <a:rPr lang="en-US" b="0" dirty="0">
-                <a:solidFill>
-                  <a:srgbClr val="CCCCCC"/>
-                </a:solidFill>
-                <a:effectLst/>
-                <a:latin typeface="Menlo" panose="020B0609030804020204" pitchFamily="49" charset="0"/>
-              </a:rPr>
-              <a:t> </a:t>
-            </a:r>
-            <a:r>
-              <a:rPr lang="en-US" b="0" dirty="0">
-                <a:solidFill>
-                  <a:srgbClr val="CE9178"/>
-                </a:solidFill>
-                <a:effectLst/>
-                <a:latin typeface="Menlo" panose="020B0609030804020204" pitchFamily="49" charset="0"/>
-              </a:rPr>
-              <a:t>"</a:t>
-            </a:r>
-            <a:r>
-              <a:rPr lang="en-US" b="0" dirty="0" err="1">
-                <a:solidFill>
-                  <a:srgbClr val="CE9178"/>
-                </a:solidFill>
-                <a:effectLst/>
-                <a:latin typeface="Menlo" panose="020B0609030804020204" pitchFamily="49" charset="0"/>
-              </a:rPr>
-              <a:t>appjedi.net@gmail.com</a:t>
-            </a:r>
-            <a:r>
-              <a:rPr lang="en-US" b="0" dirty="0">
-                <a:solidFill>
-                  <a:srgbClr val="CE9178"/>
-                </a:solidFill>
-                <a:effectLst/>
-                <a:latin typeface="Menlo" panose="020B0609030804020204" pitchFamily="49" charset="0"/>
-              </a:rPr>
-              <a:t>"</a:t>
-            </a:r>
-            <a:r>
-              <a:rPr lang="en-US" b="0" dirty="0">
-                <a:solidFill>
-                  <a:srgbClr val="CCCCCC"/>
-                </a:solidFill>
-                <a:effectLst/>
-                <a:latin typeface="Menlo" panose="020B0609030804020204" pitchFamily="49" charset="0"/>
-              </a:rPr>
-              <a:t>,</a:t>
-            </a:r>
-          </a:p>
-          <a:p>
-            <a:pPr marL="457200" lvl="1" indent="0">
-              <a:lnSpc>
-                <a:spcPts val="1350"/>
-              </a:lnSpc>
-              <a:buNone/>
-            </a:pPr>
-            <a:r>
-              <a:rPr lang="en-US" b="0" dirty="0">
-                <a:solidFill>
-                  <a:srgbClr val="9CDCFE"/>
-                </a:solidFill>
-                <a:effectLst/>
-                <a:latin typeface="Menlo" panose="020B0609030804020204" pitchFamily="49" charset="0"/>
-              </a:rPr>
-              <a:t>subject:</a:t>
-            </a:r>
-            <a:r>
-              <a:rPr lang="en-US" b="0" dirty="0">
-                <a:solidFill>
-                  <a:srgbClr val="CCCCCC"/>
-                </a:solidFill>
-                <a:effectLst/>
-                <a:latin typeface="Menlo" panose="020B0609030804020204" pitchFamily="49" charset="0"/>
-              </a:rPr>
-              <a:t> </a:t>
-            </a:r>
-            <a:r>
-              <a:rPr lang="en-US" b="0" dirty="0">
-                <a:solidFill>
-                  <a:srgbClr val="CE9178"/>
-                </a:solidFill>
-                <a:effectLst/>
-                <a:latin typeface="Menlo" panose="020B0609030804020204" pitchFamily="49" charset="0"/>
-              </a:rPr>
-              <a:t>"SQL Injection Attempted."</a:t>
-            </a:r>
-            <a:r>
-              <a:rPr lang="en-US" b="0" dirty="0">
-                <a:solidFill>
-                  <a:srgbClr val="CCCCCC"/>
-                </a:solidFill>
-                <a:effectLst/>
-                <a:latin typeface="Menlo" panose="020B0609030804020204" pitchFamily="49" charset="0"/>
-              </a:rPr>
-              <a:t>,</a:t>
-            </a:r>
-          </a:p>
-          <a:p>
-            <a:pPr marL="457200" lvl="1" indent="0">
-              <a:lnSpc>
-                <a:spcPts val="1350"/>
-              </a:lnSpc>
-              <a:buNone/>
-            </a:pPr>
-            <a:r>
-              <a:rPr lang="en-US" b="0" dirty="0">
-                <a:solidFill>
-                  <a:srgbClr val="9CDCFE"/>
-                </a:solidFill>
-                <a:effectLst/>
-                <a:latin typeface="Menlo" panose="020B0609030804020204" pitchFamily="49" charset="0"/>
-              </a:rPr>
-              <a:t>html:</a:t>
-            </a:r>
-            <a:r>
-              <a:rPr lang="en-US" b="0" dirty="0">
-                <a:solidFill>
-                  <a:srgbClr val="CCCCCC"/>
-                </a:solidFill>
-                <a:effectLst/>
-                <a:latin typeface="Menlo" panose="020B0609030804020204" pitchFamily="49" charset="0"/>
-              </a:rPr>
-              <a:t> </a:t>
-            </a:r>
-            <a:r>
-              <a:rPr lang="en-US" b="0" dirty="0" err="1">
-                <a:solidFill>
-                  <a:srgbClr val="9CDCFE"/>
-                </a:solidFill>
-                <a:effectLst/>
-                <a:latin typeface="Menlo" panose="020B0609030804020204" pitchFamily="49" charset="0"/>
-              </a:rPr>
-              <a:t>JSON</a:t>
-            </a:r>
-            <a:r>
-              <a:rPr lang="en-US" b="0" dirty="0" err="1">
-                <a:solidFill>
-                  <a:srgbClr val="CCCCCC"/>
-                </a:solidFill>
-                <a:effectLst/>
-                <a:latin typeface="Menlo" panose="020B0609030804020204" pitchFamily="49" charset="0"/>
-              </a:rPr>
-              <a:t>.</a:t>
-            </a:r>
-            <a:r>
-              <a:rPr lang="en-US" b="0" dirty="0" err="1">
-                <a:solidFill>
-                  <a:srgbClr val="DCDCAA"/>
-                </a:solidFill>
-                <a:effectLst/>
-                <a:latin typeface="Menlo" panose="020B0609030804020204" pitchFamily="49" charset="0"/>
-              </a:rPr>
-              <a:t>stringify</a:t>
-            </a:r>
-            <a:r>
-              <a:rPr lang="en-US" b="0" dirty="0">
-                <a:solidFill>
-                  <a:srgbClr val="CCCCCC"/>
-                </a:solidFill>
-                <a:effectLst/>
-                <a:latin typeface="Menlo" panose="020B0609030804020204" pitchFamily="49" charset="0"/>
-              </a:rPr>
-              <a:t>(</a:t>
-            </a:r>
-            <a:r>
-              <a:rPr lang="en-US" b="0" dirty="0">
-                <a:solidFill>
-                  <a:srgbClr val="4FC1FF"/>
-                </a:solidFill>
-                <a:effectLst/>
-                <a:latin typeface="Menlo" panose="020B0609030804020204" pitchFamily="49" charset="0"/>
-              </a:rPr>
-              <a:t>resp</a:t>
-            </a:r>
-            <a:r>
-              <a:rPr lang="en-US" b="0" dirty="0">
-                <a:solidFill>
-                  <a:srgbClr val="CCCCCC"/>
-                </a:solidFill>
-                <a:effectLst/>
-                <a:latin typeface="Menlo" panose="020B0609030804020204" pitchFamily="49" charset="0"/>
-              </a:rPr>
-              <a:t>[</a:t>
-            </a:r>
-            <a:r>
-              <a:rPr lang="en-US" b="0" dirty="0">
-                <a:solidFill>
-                  <a:srgbClr val="B5CEA8"/>
-                </a:solidFill>
-                <a:effectLst/>
-                <a:latin typeface="Menlo" panose="020B0609030804020204" pitchFamily="49" charset="0"/>
-              </a:rPr>
-              <a:t>0</a:t>
-            </a:r>
-            <a:r>
-              <a:rPr lang="en-US" b="0" dirty="0">
-                <a:solidFill>
-                  <a:srgbClr val="CCCCCC"/>
-                </a:solidFill>
-                <a:effectLst/>
-                <a:latin typeface="Menlo" panose="020B0609030804020204" pitchFamily="49" charset="0"/>
-              </a:rPr>
-              <a:t>])</a:t>
-            </a:r>
-          </a:p>
-          <a:p>
-            <a:pPr marL="0" indent="0">
-              <a:lnSpc>
-                <a:spcPts val="1350"/>
-              </a:lnSpc>
-              <a:buNone/>
-            </a:pPr>
-            <a:r>
-              <a:rPr lang="en-US" sz="2400" b="0" dirty="0">
-                <a:solidFill>
-                  <a:srgbClr val="CCCCCC"/>
-                </a:solidFill>
-                <a:effectLst/>
-                <a:latin typeface="Menlo" panose="020B0609030804020204" pitchFamily="49" charset="0"/>
-              </a:rPr>
-              <a:t>}</a:t>
-            </a:r>
-          </a:p>
-          <a:p>
-            <a:pPr marL="0" indent="0">
-              <a:lnSpc>
-                <a:spcPts val="1350"/>
-              </a:lnSpc>
-              <a:buNone/>
-            </a:pPr>
-            <a:r>
-              <a:rPr lang="en-US" sz="2400" b="0" dirty="0">
-                <a:solidFill>
-                  <a:srgbClr val="569CD6"/>
-                </a:solidFill>
-                <a:effectLst/>
-                <a:latin typeface="Menlo" panose="020B0609030804020204" pitchFamily="49" charset="0"/>
-              </a:rPr>
-              <a:t>const</a:t>
-            </a:r>
-            <a:r>
-              <a:rPr lang="en-US" sz="2400" b="0" dirty="0">
-                <a:solidFill>
-                  <a:srgbClr val="CCCCCC"/>
-                </a:solidFill>
-                <a:effectLst/>
-                <a:latin typeface="Menlo" panose="020B0609030804020204" pitchFamily="49" charset="0"/>
-              </a:rPr>
-              <a:t> </a:t>
-            </a:r>
-            <a:r>
-              <a:rPr lang="en-US" sz="2400" b="0" dirty="0" err="1">
-                <a:solidFill>
-                  <a:srgbClr val="4FC1FF"/>
-                </a:solidFill>
-                <a:effectLst/>
-                <a:latin typeface="Menlo" panose="020B0609030804020204" pitchFamily="49" charset="0"/>
-              </a:rPr>
-              <a:t>emailResp</a:t>
-            </a:r>
-            <a:r>
-              <a:rPr lang="en-US" sz="2400" b="0" dirty="0">
-                <a:solidFill>
-                  <a:srgbClr val="CCCCCC"/>
-                </a:solidFill>
-                <a:effectLst/>
-                <a:latin typeface="Menlo" panose="020B0609030804020204" pitchFamily="49" charset="0"/>
-              </a:rPr>
-              <a:t> </a:t>
-            </a:r>
-            <a:r>
-              <a:rPr lang="en-US" sz="2400" b="0" dirty="0">
-                <a:solidFill>
-                  <a:srgbClr val="D4D4D4"/>
-                </a:solidFill>
-                <a:effectLst/>
-                <a:latin typeface="Menlo" panose="020B0609030804020204" pitchFamily="49" charset="0"/>
-              </a:rPr>
-              <a:t>=</a:t>
-            </a:r>
-            <a:r>
-              <a:rPr lang="en-US" sz="2400" b="0" dirty="0">
-                <a:solidFill>
-                  <a:srgbClr val="CCCCCC"/>
-                </a:solidFill>
-                <a:effectLst/>
-                <a:latin typeface="Menlo" panose="020B0609030804020204" pitchFamily="49" charset="0"/>
-              </a:rPr>
-              <a:t> </a:t>
-            </a:r>
-            <a:r>
-              <a:rPr lang="en-US" sz="2400" b="0" dirty="0">
-                <a:solidFill>
-                  <a:srgbClr val="C586C0"/>
-                </a:solidFill>
-                <a:effectLst/>
-                <a:latin typeface="Menlo" panose="020B0609030804020204" pitchFamily="49" charset="0"/>
-              </a:rPr>
-              <a:t>await</a:t>
-            </a:r>
-            <a:r>
-              <a:rPr lang="en-US" sz="2400" b="0" dirty="0">
-                <a:solidFill>
-                  <a:srgbClr val="CCCCCC"/>
-                </a:solidFill>
-                <a:effectLst/>
-                <a:latin typeface="Menlo" panose="020B0609030804020204" pitchFamily="49" charset="0"/>
-              </a:rPr>
-              <a:t> </a:t>
-            </a:r>
-            <a:r>
-              <a:rPr lang="en-US" sz="2400" b="0" dirty="0" err="1">
-                <a:solidFill>
-                  <a:srgbClr val="569CD6"/>
-                </a:solidFill>
-                <a:effectLst/>
-                <a:latin typeface="Menlo" panose="020B0609030804020204" pitchFamily="49" charset="0"/>
-              </a:rPr>
-              <a:t>this</a:t>
-            </a:r>
-            <a:r>
-              <a:rPr lang="en-US" sz="2400" b="0" dirty="0" err="1">
-                <a:solidFill>
-                  <a:srgbClr val="CCCCCC"/>
-                </a:solidFill>
-                <a:effectLst/>
-                <a:latin typeface="Menlo" panose="020B0609030804020204" pitchFamily="49" charset="0"/>
-              </a:rPr>
-              <a:t>.</a:t>
-            </a:r>
-            <a:r>
-              <a:rPr lang="en-US" sz="2400" b="0" dirty="0" err="1">
-                <a:solidFill>
-                  <a:srgbClr val="DCDCAA"/>
-                </a:solidFill>
-                <a:effectLst/>
-                <a:latin typeface="Menlo" panose="020B0609030804020204" pitchFamily="49" charset="0"/>
-              </a:rPr>
-              <a:t>sendMail</a:t>
-            </a:r>
-            <a:r>
-              <a:rPr lang="en-US" sz="2400" b="0" dirty="0">
-                <a:solidFill>
-                  <a:srgbClr val="CCCCCC"/>
-                </a:solidFill>
-                <a:effectLst/>
-                <a:latin typeface="Menlo" panose="020B0609030804020204" pitchFamily="49" charset="0"/>
-              </a:rPr>
-              <a:t>(</a:t>
-            </a:r>
-            <a:r>
-              <a:rPr lang="en-US" sz="2400" b="0" dirty="0" err="1">
-                <a:solidFill>
-                  <a:srgbClr val="4FC1FF"/>
-                </a:solidFill>
-                <a:effectLst/>
-                <a:latin typeface="Menlo" panose="020B0609030804020204" pitchFamily="49" charset="0"/>
-              </a:rPr>
-              <a:t>contactEmail</a:t>
-            </a:r>
-            <a:r>
-              <a:rPr lang="en-US" sz="2400" b="0" dirty="0">
-                <a:solidFill>
-                  <a:srgbClr val="CCCCCC"/>
-                </a:solidFill>
-                <a:effectLst/>
-                <a:latin typeface="Menlo" panose="020B0609030804020204" pitchFamily="49" charset="0"/>
-              </a:rPr>
-              <a:t>);</a:t>
-            </a:r>
-          </a:p>
-          <a:p>
-            <a:pPr marL="0" indent="0">
-              <a:lnSpc>
-                <a:spcPts val="1350"/>
-              </a:lnSpc>
-              <a:buNone/>
-            </a:pPr>
-            <a:endParaRPr lang="en-US" sz="1600" b="0" dirty="0">
-              <a:solidFill>
-                <a:srgbClr val="CCCCCC"/>
-              </a:solidFill>
-              <a:effectLst/>
-              <a:latin typeface="Menlo" panose="020B0609030804020204" pitchFamily="49" charset="0"/>
-            </a:endParaRPr>
-          </a:p>
-          <a:p>
-            <a:pPr marL="0" indent="0">
-              <a:buNone/>
-            </a:pPr>
-            <a:endParaRPr lang="en-US" sz="1600" dirty="0"/>
-          </a:p>
-        </p:txBody>
-      </p:sp>
-    </p:spTree>
-    <p:extLst>
-      <p:ext uri="{BB962C8B-B14F-4D97-AF65-F5344CB8AC3E}">
-        <p14:creationId xmlns:p14="http://schemas.microsoft.com/office/powerpoint/2010/main" val="623174793"/>
-      </p:ext>
-    </p:extLst>
-  </p:cSld>
-  <p:clrMapOvr>
-    <a:masterClrMapping/>
-  </p:clrMapOvr>
-</p:sld>
-</file>
-
-<file path=ppt/slides/slide13.xml><?xml version="1.0" encoding="utf-8"?>
-<p:sld xmlns:a="http://schemas.openxmlformats.org/drawingml/2006/main" xmlns:r="http://schemas.openxmlformats.org/officeDocument/2006/relationships" xmlns:p="http://schemas.openxmlformats.org/presentationml/2006/main">
-  <p:cSld>
-    <p:spTree>
-      <p:nvGrpSpPr>
-        <p:cNvPr id="1" name=""/>
-        <p:cNvGrpSpPr/>
-        <p:nvPr/>
-      </p:nvGrpSpPr>
-      <p:grpSpPr>
-        <a:xfrm>
-          <a:off x="0" y="0"/>
-          <a:ext cx="0" cy="0"/>
-          <a:chOff x="0" y="0"/>
-          <a:chExt cx="0" cy="0"/>
-        </a:xfrm>
-      </p:grpSpPr>
-      <p:sp>
-        <p:nvSpPr>
-          <p:cNvPr id="2" name="Title 1">
-            <a:extLst>
-              <a:ext uri="{FF2B5EF4-FFF2-40B4-BE49-F238E27FC236}">
-                <a16:creationId xmlns:a16="http://schemas.microsoft.com/office/drawing/2014/main" id="{511777B9-8D34-7738-0C77-7AE1B2F741A4}"/>
-              </a:ext>
-            </a:extLst>
-          </p:cNvPr>
-          <p:cNvSpPr>
-            <a:spLocks noGrp="1"/>
-          </p:cNvSpPr>
-          <p:nvPr>
-            <p:ph type="title"/>
-          </p:nvPr>
-        </p:nvSpPr>
-        <p:spPr/>
-        <p:txBody>
-          <a:bodyPr/>
-          <a:lstStyle/>
-          <a:p>
-            <a:r>
-              <a:rPr lang="en-US" dirty="0"/>
-              <a:t>Summary:	</a:t>
-            </a:r>
-          </a:p>
-        </p:txBody>
-      </p:sp>
-      <p:sp>
-        <p:nvSpPr>
-          <p:cNvPr id="3" name="Content Placeholder 2">
-            <a:extLst>
-              <a:ext uri="{FF2B5EF4-FFF2-40B4-BE49-F238E27FC236}">
-                <a16:creationId xmlns:a16="http://schemas.microsoft.com/office/drawing/2014/main" id="{9EE4F841-34EE-92F2-83FF-72B51DEE6A32}"/>
-              </a:ext>
-            </a:extLst>
-          </p:cNvPr>
-          <p:cNvSpPr>
-            <a:spLocks noGrp="1"/>
-          </p:cNvSpPr>
-          <p:nvPr>
-            <p:ph idx="1"/>
-          </p:nvPr>
-        </p:nvSpPr>
-        <p:spPr>
-          <a:xfrm>
-            <a:off x="838200" y="1690688"/>
-            <a:ext cx="10515600" cy="4351338"/>
-          </a:xfrm>
-        </p:spPr>
-        <p:txBody>
-          <a:bodyPr/>
-          <a:lstStyle/>
-          <a:p>
-            <a:r>
-              <a:rPr lang="en-US" b="1" dirty="0">
-                <a:solidFill>
-                  <a:srgbClr val="FF0000"/>
-                </a:solidFill>
-              </a:rPr>
-              <a:t>NEVER USE </a:t>
-            </a:r>
-            <a:r>
-              <a:rPr lang="en-US" b="1" strike="sngStrike" dirty="0">
-                <a:solidFill>
-                  <a:srgbClr val="FF0000"/>
-                </a:solidFill>
-              </a:rPr>
-              <a:t>DYNAMIC SQL</a:t>
-            </a:r>
-            <a:r>
-              <a:rPr lang="en-US" b="1" dirty="0">
-                <a:solidFill>
-                  <a:srgbClr val="FF0000"/>
-                </a:solidFill>
-              </a:rPr>
-              <a:t>!!!  JUST SAY NO!!!</a:t>
-            </a:r>
-          </a:p>
-          <a:p>
-            <a:r>
-              <a:rPr lang="en-US" b="1" dirty="0">
-                <a:solidFill>
-                  <a:srgbClr val="00B050"/>
-                </a:solidFill>
-              </a:rPr>
-              <a:t>Always validate data on the server (app, database or both).</a:t>
-            </a:r>
-          </a:p>
-          <a:p>
-            <a:r>
-              <a:rPr lang="en-US" b="1" dirty="0">
-                <a:solidFill>
-                  <a:srgbClr val="00B050"/>
-                </a:solidFill>
-              </a:rPr>
-              <a:t>Use prepared statements or better yet stored procedures.</a:t>
-            </a:r>
-          </a:p>
-          <a:p>
-            <a:r>
-              <a:rPr lang="en-US" b="1" dirty="0">
-                <a:solidFill>
-                  <a:srgbClr val="00B050"/>
-                </a:solidFill>
-              </a:rPr>
-              <a:t>Log database access attempts.</a:t>
-            </a:r>
-          </a:p>
-          <a:p>
-            <a:endParaRPr lang="en-US" b="1" dirty="0">
-              <a:solidFill>
-                <a:srgbClr val="00B050"/>
-              </a:solidFill>
-            </a:endParaRPr>
-          </a:p>
-          <a:p>
-            <a:pPr marL="0" indent="0">
-              <a:buNone/>
-            </a:pPr>
-            <a:r>
-              <a:rPr lang="en-US" b="1" dirty="0">
-                <a:solidFill>
-                  <a:srgbClr val="0070C0"/>
-                </a:solidFill>
-              </a:rPr>
-              <a:t>Thank you.  Please </a:t>
-            </a:r>
-            <a:r>
-              <a:rPr lang="en-US" b="1" dirty="0">
-                <a:solidFill>
-                  <a:srgbClr val="00B050"/>
-                </a:solidFill>
-              </a:rPr>
-              <a:t>like</a:t>
-            </a:r>
-            <a:r>
-              <a:rPr lang="en-US" b="1" dirty="0">
-                <a:solidFill>
-                  <a:srgbClr val="0070C0"/>
-                </a:solidFill>
-              </a:rPr>
-              <a:t> and </a:t>
-            </a:r>
-            <a:r>
-              <a:rPr lang="en-US" b="1" dirty="0">
-                <a:solidFill>
-                  <a:srgbClr val="00B050"/>
-                </a:solidFill>
-              </a:rPr>
-              <a:t>subscribe</a:t>
-            </a:r>
-            <a:r>
-              <a:rPr lang="en-US" b="1" dirty="0">
-                <a:solidFill>
-                  <a:srgbClr val="0070C0"/>
-                </a:solidFill>
-              </a:rPr>
-              <a:t> to my channel.</a:t>
-            </a:r>
-          </a:p>
-          <a:p>
-            <a:pPr marL="0" indent="0">
-              <a:buNone/>
-            </a:pPr>
-            <a:r>
-              <a:rPr lang="en-US" b="1" dirty="0">
-                <a:solidFill>
-                  <a:srgbClr val="0070C0"/>
-                </a:solidFill>
-              </a:rPr>
-              <a:t>Visit me online at:  </a:t>
-            </a:r>
-            <a:r>
-              <a:rPr lang="en-US" sz="3600" b="1" dirty="0">
-                <a:solidFill>
-                  <a:srgbClr val="0070C0"/>
-                </a:solidFill>
-                <a:hlinkClick r:id="rId2">
-                  <a:extLst>
-                    <a:ext uri="{A12FA001-AC4F-418D-AE19-62706E023703}">
-                      <ahyp:hlinkClr xmlns:ahyp="http://schemas.microsoft.com/office/drawing/2018/hyperlinkcolor" val="tx"/>
-                    </a:ext>
-                  </a:extLst>
-                </a:hlinkClick>
-              </a:rPr>
-              <a:t>www.appjedi.net</a:t>
-            </a:r>
-            <a:endParaRPr lang="en-US" sz="3600" b="1" dirty="0">
-              <a:solidFill>
-                <a:srgbClr val="0070C0"/>
-              </a:solidFill>
-            </a:endParaRPr>
-          </a:p>
-          <a:p>
-            <a:pPr marL="0" indent="0">
-              <a:buNone/>
-            </a:pPr>
-            <a:r>
-              <a:rPr lang="en-US" b="1" dirty="0"/>
-              <a:t>	</a:t>
-            </a:r>
-            <a:r>
-              <a:rPr lang="en-US" sz="2400" dirty="0"/>
-              <a:t>see links for my LinkedIn, Reddit, Facebook</a:t>
-            </a:r>
-          </a:p>
-        </p:txBody>
-      </p:sp>
-    </p:spTree>
-    <p:extLst>
-      <p:ext uri="{BB962C8B-B14F-4D97-AF65-F5344CB8AC3E}">
-        <p14:creationId xmlns:p14="http://schemas.microsoft.com/office/powerpoint/2010/main" val="3453724624"/>
       </p:ext>
     </p:extLst>
   </p:cSld>

--- a/SQL/SQL Python.pptx
+++ b/SQL/SQL Python.pptx
@@ -267,7 +267,7 @@
           <a:p>
             <a:fld id="{29BFA9FA-A652-404D-BE65-545D295A3195}" type="datetimeFigureOut">
               <a:rPr lang="en-US" smtClean="0"/>
-              <a:t>9/20/26</a:t>
+              <a:t>9/20/2026</a:t>
             </a:fld>
             <a:endParaRPr lang="en-US"/>
           </a:p>
@@ -465,7 +465,7 @@
           <a:p>
             <a:fld id="{29BFA9FA-A652-404D-BE65-545D295A3195}" type="datetimeFigureOut">
               <a:rPr lang="en-US" smtClean="0"/>
-              <a:t>9/20/26</a:t>
+              <a:t>9/20/2026</a:t>
             </a:fld>
             <a:endParaRPr lang="en-US"/>
           </a:p>
@@ -673,7 +673,7 @@
           <a:p>
             <a:fld id="{29BFA9FA-A652-404D-BE65-545D295A3195}" type="datetimeFigureOut">
               <a:rPr lang="en-US" smtClean="0"/>
-              <a:t>9/20/26</a:t>
+              <a:t>9/20/2026</a:t>
             </a:fld>
             <a:endParaRPr lang="en-US"/>
           </a:p>
@@ -871,7 +871,7 @@
           <a:p>
             <a:fld id="{29BFA9FA-A652-404D-BE65-545D295A3195}" type="datetimeFigureOut">
               <a:rPr lang="en-US" smtClean="0"/>
-              <a:t>9/20/26</a:t>
+              <a:t>9/20/2026</a:t>
             </a:fld>
             <a:endParaRPr lang="en-US"/>
           </a:p>
@@ -1146,7 +1146,7 @@
           <a:p>
             <a:fld id="{29BFA9FA-A652-404D-BE65-545D295A3195}" type="datetimeFigureOut">
               <a:rPr lang="en-US" smtClean="0"/>
-              <a:t>9/20/26</a:t>
+              <a:t>9/20/2026</a:t>
             </a:fld>
             <a:endParaRPr lang="en-US"/>
           </a:p>
@@ -1411,7 +1411,7 @@
           <a:p>
             <a:fld id="{29BFA9FA-A652-404D-BE65-545D295A3195}" type="datetimeFigureOut">
               <a:rPr lang="en-US" smtClean="0"/>
-              <a:t>9/20/26</a:t>
+              <a:t>9/20/2026</a:t>
             </a:fld>
             <a:endParaRPr lang="en-US"/>
           </a:p>
@@ -1823,7 +1823,7 @@
           <a:p>
             <a:fld id="{29BFA9FA-A652-404D-BE65-545D295A3195}" type="datetimeFigureOut">
               <a:rPr lang="en-US" smtClean="0"/>
-              <a:t>9/20/26</a:t>
+              <a:t>9/20/2026</a:t>
             </a:fld>
             <a:endParaRPr lang="en-US"/>
           </a:p>
@@ -1964,7 +1964,7 @@
           <a:p>
             <a:fld id="{29BFA9FA-A652-404D-BE65-545D295A3195}" type="datetimeFigureOut">
               <a:rPr lang="en-US" smtClean="0"/>
-              <a:t>9/20/26</a:t>
+              <a:t>9/20/2026</a:t>
             </a:fld>
             <a:endParaRPr lang="en-US"/>
           </a:p>
@@ -2077,7 +2077,7 @@
           <a:p>
             <a:fld id="{29BFA9FA-A652-404D-BE65-545D295A3195}" type="datetimeFigureOut">
               <a:rPr lang="en-US" smtClean="0"/>
-              <a:t>9/20/26</a:t>
+              <a:t>9/20/2026</a:t>
             </a:fld>
             <a:endParaRPr lang="en-US"/>
           </a:p>
@@ -2388,7 +2388,7 @@
           <a:p>
             <a:fld id="{29BFA9FA-A652-404D-BE65-545D295A3195}" type="datetimeFigureOut">
               <a:rPr lang="en-US" smtClean="0"/>
-              <a:t>9/20/26</a:t>
+              <a:t>9/20/2026</a:t>
             </a:fld>
             <a:endParaRPr lang="en-US"/>
           </a:p>
@@ -2676,7 +2676,7 @@
           <a:p>
             <a:fld id="{29BFA9FA-A652-404D-BE65-545D295A3195}" type="datetimeFigureOut">
               <a:rPr lang="en-US" smtClean="0"/>
-              <a:t>9/20/26</a:t>
+              <a:t>9/20/2026</a:t>
             </a:fld>
             <a:endParaRPr lang="en-US"/>
           </a:p>
@@ -2917,7 +2917,7 @@
           <a:p>
             <a:fld id="{29BFA9FA-A652-404D-BE65-545D295A3195}" type="datetimeFigureOut">
               <a:rPr lang="en-US" smtClean="0"/>
-              <a:t>9/20/26</a:t>
+              <a:t>9/20/2026</a:t>
             </a:fld>
             <a:endParaRPr lang="en-US"/>
           </a:p>
@@ -4432,7 +4432,7 @@
         <p:spPr/>
         <p:txBody>
           <a:bodyPr>
-            <a:normAutofit fontScale="70000" lnSpcReduction="20000"/>
+            <a:normAutofit fontScale="62500" lnSpcReduction="20000"/>
           </a:bodyPr>
           <a:lstStyle/>
           <a:p>
@@ -4487,11 +4487,19 @@
             </a:r>
             <a:r>
               <a:rPr lang="en-US" dirty="0" err="1"/>
-              <a:t>get_user</a:t>
-            </a:r>
-            <a:r>
-              <a:rPr lang="en-US" dirty="0"/>
-              <a:t>", [123])</a:t>
+              <a:t>usp_user_auth</a:t>
+            </a:r>
+            <a:r>
+              <a:rPr lang="en-US" dirty="0"/>
+              <a:t>", [</a:t>
+            </a:r>
+            <a:r>
+              <a:rPr lang="en-US" dirty="0" err="1"/>
+              <a:t>username,password</a:t>
+            </a:r>
+            <a:r>
+              <a:rPr lang="en-US" dirty="0"/>
+              <a:t>])</a:t>
             </a:r>
           </a:p>
           <a:p>
@@ -4526,15 +4534,24 @@
             </a:pPr>
             <a:r>
               <a:rPr lang="en-US" dirty="0"/>
-              <a:t>for row in </a:t>
+              <a:t>	row = </a:t>
             </a:r>
             <a:r>
               <a:rPr lang="en-US" dirty="0" err="1"/>
-              <a:t>result.fetchall</a:t>
-            </a:r>
-            <a:r>
-              <a:rPr lang="en-US" dirty="0"/>
-              <a:t>():</a:t>
+              <a:t>result.fetchone</a:t>
+            </a:r>
+            <a:r>
+              <a:rPr lang="en-US" dirty="0"/>
+              <a:t>()</a:t>
+            </a:r>
+          </a:p>
+          <a:p>
+            <a:pPr marL="0" indent="0">
+              <a:buNone/>
+            </a:pPr>
+            <a:r>
+              <a:rPr lang="en-US" dirty="0"/>
+              <a:t>	break</a:t>
             </a:r>
           </a:p>
           <a:p>

--- a/SQL/SQL Python.pptx
+++ b/SQL/SQL Python.pptx
@@ -14,6 +14,7 @@
     <p:sldId id="261" r:id="rId8"/>
     <p:sldId id="262" r:id="rId9"/>
     <p:sldId id="263" r:id="rId10"/>
+    <p:sldId id="269" r:id="rId11"/>
   </p:sldIdLst>
   <p:sldSz cx="12192000" cy="6858000"/>
   <p:notesSz cx="6858000" cy="9144000"/>
@@ -3415,6 +3416,92 @@
 </p:sld>
 </file>
 
+<file path=ppt/slides/slide10.xml><?xml version="1.0" encoding="utf-8"?>
+<p:sld xmlns:a="http://schemas.openxmlformats.org/drawingml/2006/main" xmlns:r="http://schemas.openxmlformats.org/officeDocument/2006/relationships" xmlns:p="http://schemas.openxmlformats.org/presentationml/2006/main">
+  <p:cSld>
+    <p:spTree>
+      <p:nvGrpSpPr>
+        <p:cNvPr id="1" name=""/>
+        <p:cNvGrpSpPr/>
+        <p:nvPr/>
+      </p:nvGrpSpPr>
+      <p:grpSpPr>
+        <a:xfrm>
+          <a:off x="0" y="0"/>
+          <a:ext cx="0" cy="0"/>
+          <a:chOff x="0" y="0"/>
+          <a:chExt cx="0" cy="0"/>
+        </a:xfrm>
+      </p:grpSpPr>
+      <p:sp>
+        <p:nvSpPr>
+          <p:cNvPr id="2" name="Title 1">
+            <a:extLst>
+              <a:ext uri="{FF2B5EF4-FFF2-40B4-BE49-F238E27FC236}">
+                <a16:creationId xmlns:a16="http://schemas.microsoft.com/office/drawing/2014/main" id="{7B6C99B8-9062-4AB3-F9F6-999AFCCCD759}"/>
+              </a:ext>
+            </a:extLst>
+          </p:cNvPr>
+          <p:cNvSpPr>
+            <a:spLocks noGrp="1"/>
+          </p:cNvSpPr>
+          <p:nvPr>
+            <p:ph type="title"/>
+          </p:nvPr>
+        </p:nvSpPr>
+        <p:spPr/>
+        <p:txBody>
+          <a:bodyPr/>
+          <a:lstStyle/>
+          <a:p>
+            <a:r>
+              <a:rPr lang="en-US" dirty="0"/>
+              <a:t>Next</a:t>
+            </a:r>
+          </a:p>
+        </p:txBody>
+      </p:sp>
+      <p:sp>
+        <p:nvSpPr>
+          <p:cNvPr id="3" name="Content Placeholder 2">
+            <a:extLst>
+              <a:ext uri="{FF2B5EF4-FFF2-40B4-BE49-F238E27FC236}">
+                <a16:creationId xmlns:a16="http://schemas.microsoft.com/office/drawing/2014/main" id="{C8547564-B51C-3FF7-2F2B-060ABAA1F8FF}"/>
+              </a:ext>
+            </a:extLst>
+          </p:cNvPr>
+          <p:cNvSpPr>
+            <a:spLocks noGrp="1"/>
+          </p:cNvSpPr>
+          <p:nvPr>
+            <p:ph idx="1"/>
+          </p:nvPr>
+        </p:nvSpPr>
+        <p:spPr/>
+        <p:txBody>
+          <a:bodyPr/>
+          <a:lstStyle/>
+          <a:p>
+            <a:r>
+              <a:rPr lang="en-US"/>
+              <a:t>Next</a:t>
+            </a:r>
+          </a:p>
+        </p:txBody>
+      </p:sp>
+    </p:spTree>
+    <p:extLst>
+      <p:ext uri="{BB962C8B-B14F-4D97-AF65-F5344CB8AC3E}">
+        <p14:creationId xmlns:p14="http://schemas.microsoft.com/office/powerpoint/2010/main" val="1508767249"/>
+      </p:ext>
+    </p:extLst>
+  </p:cSld>
+  <p:clrMapOvr>
+    <a:masterClrMapping/>
+  </p:clrMapOvr>
+</p:sld>
+</file>
+
 <file path=ppt/slides/slide2.xml><?xml version="1.0" encoding="utf-8"?>
 <p:sld xmlns:a="http://schemas.openxmlformats.org/drawingml/2006/main" xmlns:r="http://schemas.openxmlformats.org/officeDocument/2006/relationships" xmlns:p="http://schemas.openxmlformats.org/presentationml/2006/main">
   <p:cSld>
@@ -4664,290 +4751,38 @@
           </a:p>
         </p:txBody>
       </p:sp>
-      <p:sp>
-        <p:nvSpPr>
-          <p:cNvPr id="3" name="Content Placeholder 2">
-            <a:extLst>
-              <a:ext uri="{FF2B5EF4-FFF2-40B4-BE49-F238E27FC236}">
-                <a16:creationId xmlns:a16="http://schemas.microsoft.com/office/drawing/2014/main" id="{B7350278-32DF-3B9B-1D7B-1AC4FA279CD2}"/>
-              </a:ext>
-            </a:extLst>
-          </p:cNvPr>
-          <p:cNvSpPr>
-            <a:spLocks noGrp="1"/>
-          </p:cNvSpPr>
+      <p:pic>
+        <p:nvPicPr>
+          <p:cNvPr id="5" name="Content Placeholder 4">
+            <a:extLst>
+              <a:ext uri="{FF2B5EF4-FFF2-40B4-BE49-F238E27FC236}">
+                <a16:creationId xmlns:a16="http://schemas.microsoft.com/office/drawing/2014/main" id="{15C97C2D-F072-E28C-A7E9-F1AE86DE85A6}"/>
+              </a:ext>
+            </a:extLst>
+          </p:cNvPr>
+          <p:cNvPicPr>
+            <a:picLocks noGrp="1" noChangeAspect="1"/>
+          </p:cNvPicPr>
           <p:nvPr>
             <p:ph idx="1"/>
           </p:nvPr>
-        </p:nvSpPr>
-        <p:spPr/>
-        <p:txBody>
-          <a:bodyPr>
-            <a:normAutofit fontScale="55000" lnSpcReduction="20000"/>
-          </a:bodyPr>
-          <a:lstStyle/>
-          <a:p>
-            <a:pPr marL="0" indent="0">
-              <a:buNone/>
-            </a:pPr>
-            <a:r>
-              <a:rPr lang="en-US" dirty="0"/>
-              <a:t>CREATE  PROCEDURE `</a:t>
-            </a:r>
-            <a:r>
-              <a:rPr lang="en-US" dirty="0" err="1"/>
-              <a:t>usp_user_auth</a:t>
-            </a:r>
-            <a:r>
-              <a:rPr lang="en-US" dirty="0"/>
-              <a:t>`(IN `</a:t>
-            </a:r>
-            <a:r>
-              <a:rPr lang="en-US" dirty="0" err="1"/>
-              <a:t>p_username</a:t>
-            </a:r>
-            <a:r>
-              <a:rPr lang="en-US" dirty="0"/>
-              <a:t>` VARCHAR(50), IN `</a:t>
-            </a:r>
-            <a:r>
-              <a:rPr lang="en-US" dirty="0" err="1"/>
-              <a:t>p_password</a:t>
-            </a:r>
-            <a:r>
-              <a:rPr lang="en-US" dirty="0"/>
-              <a:t>` VARCHAR(50))</a:t>
-            </a:r>
-          </a:p>
-          <a:p>
-            <a:pPr marL="0" indent="0">
-              <a:buNone/>
-            </a:pPr>
-            <a:r>
-              <a:rPr lang="en-US" dirty="0"/>
-              <a:t>main: BEGIN</a:t>
-            </a:r>
-          </a:p>
-          <a:p>
-            <a:pPr marL="0" indent="0">
-              <a:buNone/>
-            </a:pPr>
-            <a:r>
-              <a:rPr lang="en-US" dirty="0"/>
-              <a:t>	DECLARE </a:t>
-            </a:r>
-            <a:r>
-              <a:rPr lang="en-US" dirty="0" err="1"/>
-              <a:t>userId</a:t>
-            </a:r>
-            <a:r>
-              <a:rPr lang="en-US" dirty="0"/>
-              <a:t> INT;</a:t>
-            </a:r>
-          </a:p>
-          <a:p>
-            <a:pPr marL="0" indent="0">
-              <a:buNone/>
-            </a:pPr>
-            <a:r>
-              <a:rPr lang="en-US" dirty="0"/>
-              <a:t>    DECLARE </a:t>
-            </a:r>
-            <a:r>
-              <a:rPr lang="en-US" dirty="0" err="1"/>
-              <a:t>roleId</a:t>
-            </a:r>
-            <a:r>
-              <a:rPr lang="en-US" dirty="0"/>
-              <a:t> INT;</a:t>
-            </a:r>
-          </a:p>
-          <a:p>
-            <a:pPr marL="0" indent="0">
-              <a:buNone/>
-            </a:pPr>
-            <a:r>
-              <a:rPr lang="en-US" dirty="0"/>
-              <a:t>    SET </a:t>
-            </a:r>
-            <a:r>
-              <a:rPr lang="en-US" dirty="0" err="1"/>
-              <a:t>userId</a:t>
-            </a:r>
-            <a:r>
-              <a:rPr lang="en-US" dirty="0"/>
-              <a:t>=0;</a:t>
-            </a:r>
-          </a:p>
-          <a:p>
-            <a:pPr marL="0" indent="0">
-              <a:buNone/>
-            </a:pPr>
-            <a:r>
-              <a:rPr lang="en-US" dirty="0"/>
-              <a:t>	SELECT </a:t>
-            </a:r>
-            <a:r>
-              <a:rPr lang="en-US" dirty="0" err="1"/>
-              <a:t>user_id</a:t>
-            </a:r>
-            <a:r>
-              <a:rPr lang="en-US" dirty="0"/>
-              <a:t>, </a:t>
-            </a:r>
-            <a:r>
-              <a:rPr lang="en-US" dirty="0" err="1"/>
-              <a:t>role_id</a:t>
-            </a:r>
-            <a:r>
-              <a:rPr lang="en-US" dirty="0"/>
-              <a:t> INTO </a:t>
-            </a:r>
-            <a:r>
-              <a:rPr lang="en-US" dirty="0" err="1"/>
-              <a:t>userId</a:t>
-            </a:r>
-            <a:r>
-              <a:rPr lang="en-US" dirty="0"/>
-              <a:t>, </a:t>
-            </a:r>
-            <a:r>
-              <a:rPr lang="en-US" dirty="0" err="1"/>
-              <a:t>roleId</a:t>
-            </a:r>
-            <a:r>
-              <a:rPr lang="en-US" dirty="0"/>
-              <a:t> FROM users WHERE username=</a:t>
-            </a:r>
-            <a:r>
-              <a:rPr lang="en-US" dirty="0" err="1"/>
-              <a:t>p_username</a:t>
-            </a:r>
-            <a:r>
-              <a:rPr lang="en-US" dirty="0"/>
-              <a:t> AND password=</a:t>
-            </a:r>
-            <a:r>
-              <a:rPr lang="en-US" dirty="0" err="1"/>
-              <a:t>p_password</a:t>
-            </a:r>
-            <a:r>
-              <a:rPr lang="en-US" dirty="0"/>
-              <a:t>;</a:t>
-            </a:r>
-          </a:p>
-          <a:p>
-            <a:pPr marL="0" indent="0">
-              <a:buNone/>
-            </a:pPr>
-            <a:r>
-              <a:rPr lang="en-US" dirty="0"/>
-              <a:t>    IF </a:t>
-            </a:r>
-            <a:r>
-              <a:rPr lang="en-US" dirty="0" err="1"/>
-              <a:t>userId</a:t>
-            </a:r>
-            <a:r>
-              <a:rPr lang="en-US" dirty="0"/>
-              <a:t> &gt;0 THEN</a:t>
-            </a:r>
-          </a:p>
-          <a:p>
-            <a:pPr marL="0" indent="0">
-              <a:buNone/>
-            </a:pPr>
-            <a:r>
-              <a:rPr lang="en-US" dirty="0"/>
-              <a:t>		SELECT 1 AS `status`, 'User Authenticated' AS message, </a:t>
-            </a:r>
-            <a:r>
-              <a:rPr lang="en-US" dirty="0" err="1"/>
-              <a:t>userId</a:t>
-            </a:r>
-            <a:r>
-              <a:rPr lang="en-US" dirty="0"/>
-              <a:t>, </a:t>
-            </a:r>
-            <a:r>
-              <a:rPr lang="en-US" dirty="0" err="1"/>
-              <a:t>p_username</a:t>
-            </a:r>
-            <a:r>
-              <a:rPr lang="en-US" dirty="0"/>
-              <a:t> AS username, </a:t>
-            </a:r>
-            <a:r>
-              <a:rPr lang="en-US" dirty="0" err="1"/>
-              <a:t>roleId</a:t>
-            </a:r>
-            <a:r>
-              <a:rPr lang="en-US" dirty="0"/>
-              <a:t>;</a:t>
-            </a:r>
-          </a:p>
-          <a:p>
-            <a:pPr marL="0" indent="0">
-              <a:buNone/>
-            </a:pPr>
-            <a:r>
-              <a:rPr lang="en-US" dirty="0"/>
-              <a:t>	ELSE</a:t>
-            </a:r>
-          </a:p>
-          <a:p>
-            <a:pPr marL="0" indent="0">
-              <a:buNone/>
-            </a:pPr>
-            <a:r>
-              <a:rPr lang="en-US" dirty="0"/>
-              <a:t>		SELECT -1 AS `status`, 'User NOT Authenticated' AS </a:t>
-            </a:r>
-            <a:r>
-              <a:rPr lang="en-US" dirty="0" err="1"/>
-              <a:t>message,userId</a:t>
-            </a:r>
-            <a:r>
-              <a:rPr lang="en-US" dirty="0"/>
-              <a:t>, </a:t>
-            </a:r>
-            <a:r>
-              <a:rPr lang="en-US" dirty="0" err="1"/>
-              <a:t>p_username</a:t>
-            </a:r>
-            <a:r>
-              <a:rPr lang="en-US" dirty="0"/>
-              <a:t> AS username, 0 AS </a:t>
-            </a:r>
-            <a:r>
-              <a:rPr lang="en-US" dirty="0" err="1"/>
-              <a:t>roleId</a:t>
-            </a:r>
-            <a:r>
-              <a:rPr lang="en-US" dirty="0"/>
-              <a:t>;</a:t>
-            </a:r>
-          </a:p>
-          <a:p>
-            <a:pPr marL="0" indent="0">
-              <a:buNone/>
-            </a:pPr>
-            <a:r>
-              <a:rPr lang="en-US" dirty="0"/>
-              <a:t>	END IF;</a:t>
-            </a:r>
-          </a:p>
-          <a:p>
-            <a:pPr marL="0" indent="0">
-              <a:buNone/>
-            </a:pPr>
-            <a:r>
-              <a:rPr lang="en-US" dirty="0"/>
-              <a:t>END</a:t>
-            </a:r>
-          </a:p>
-        </p:txBody>
-      </p:sp>
+        </p:nvPicPr>
+        <p:blipFill>
+          <a:blip r:embed="rId2"/>
+          <a:stretch>
+            <a:fillRect/>
+          </a:stretch>
+        </p:blipFill>
+        <p:spPr>
+          <a:xfrm>
+            <a:off x="1303451" y="1690687"/>
+            <a:ext cx="10465145" cy="3855584"/>
+          </a:xfrm>
+          <a:prstGeom prst="rect">
+            <a:avLst/>
+          </a:prstGeom>
+        </p:spPr>
+      </p:pic>
     </p:spTree>
     <p:extLst>
       <p:ext uri="{BB962C8B-B14F-4D97-AF65-F5344CB8AC3E}">
